--- a/PPTs/L0.1 Why Learn Assembly.pptx
+++ b/PPTs/L0.1 Why Learn Assembly.pptx
@@ -9098,7 +9098,7 @@
                 <a:latin typeface="Consolas" panose="020B0609020204030204" pitchFamily="49" charset="0"/>
                 <a:cs typeface="Consolas" panose="020B0609020204030204" pitchFamily="49" charset="0"/>
               </a:rPr>
-              <a:t>LWR r0, =x</a:t>
+              <a:t>LDR r0, =x</a:t>
             </a:r>
           </a:p>
           <a:p>
@@ -9110,7 +9110,7 @@
                 <a:latin typeface="Consolas" panose="020B0609020204030204" pitchFamily="49" charset="0"/>
                 <a:cs typeface="Consolas" panose="020B0609020204030204" pitchFamily="49" charset="0"/>
               </a:rPr>
-              <a:t>LWR r1, [r0]</a:t>
+              <a:t>LDR r1, [r0]</a:t>
             </a:r>
           </a:p>
           <a:p>
@@ -9648,7 +9648,7 @@
                 <a:latin typeface="Consolas" panose="020B0609020204030204" pitchFamily="49" charset="0"/>
                 <a:cs typeface="Consolas" panose="020B0609020204030204" pitchFamily="49" charset="0"/>
               </a:rPr>
-              <a:t>LWR r2, =x</a:t>
+              <a:t>LDR r2, =x</a:t>
             </a:r>
           </a:p>
           <a:p>
@@ -9660,7 +9660,7 @@
                 <a:latin typeface="Consolas" panose="020B0609020204030204" pitchFamily="49" charset="0"/>
                 <a:cs typeface="Consolas" panose="020B0609020204030204" pitchFamily="49" charset="0"/>
               </a:rPr>
-              <a:t>LWR r3, [r2]</a:t>
+              <a:t>LDR r3, [r2]</a:t>
             </a:r>
           </a:p>
           <a:p>
@@ -10378,7 +10378,7 @@
                 <a:latin typeface="Consolas" panose="020B0609020204030204" pitchFamily="49" charset="0"/>
                 <a:cs typeface="Consolas" panose="020B0609020204030204" pitchFamily="49" charset="0"/>
               </a:rPr>
-              <a:t>LWR r2, =x</a:t>
+              <a:t>LDR r2, =x</a:t>
             </a:r>
           </a:p>
           <a:p>
@@ -10390,7 +10390,7 @@
                 <a:latin typeface="Consolas" panose="020B0609020204030204" pitchFamily="49" charset="0"/>
                 <a:cs typeface="Consolas" panose="020B0609020204030204" pitchFamily="49" charset="0"/>
               </a:rPr>
-              <a:t>LWR r3, [r2]</a:t>
+              <a:t>LDR r3, [r2]</a:t>
             </a:r>
           </a:p>
           <a:p>
@@ -10478,7 +10478,7 @@
                 <a:latin typeface="Consolas" panose="020B0609020204030204" pitchFamily="49" charset="0"/>
                 <a:cs typeface="Consolas" panose="020B0609020204030204" pitchFamily="49" charset="0"/>
               </a:rPr>
-              <a:t>LWR r0, =x</a:t>
+              <a:t>LDR r0, =x</a:t>
             </a:r>
           </a:p>
           <a:p>
@@ -10490,7 +10490,7 @@
                 <a:latin typeface="Consolas" panose="020B0609020204030204" pitchFamily="49" charset="0"/>
                 <a:cs typeface="Consolas" panose="020B0609020204030204" pitchFamily="49" charset="0"/>
               </a:rPr>
-              <a:t>LWR r1, [r0]</a:t>
+              <a:t>LDR r1, [r0]</a:t>
             </a:r>
           </a:p>
           <a:p>
@@ -11032,7 +11032,7 @@
                 <a:latin typeface="Consolas" panose="020B0609020204030204" pitchFamily="49" charset="0"/>
                 <a:cs typeface="Consolas" panose="020B0609020204030204" pitchFamily="49" charset="0"/>
               </a:rPr>
-              <a:t>LWR r2, =x</a:t>
+              <a:t>LDR r2, =x</a:t>
             </a:r>
           </a:p>
           <a:p>
@@ -11044,7 +11044,7 @@
                 <a:latin typeface="Consolas" panose="020B0609020204030204" pitchFamily="49" charset="0"/>
                 <a:cs typeface="Consolas" panose="020B0609020204030204" pitchFamily="49" charset="0"/>
               </a:rPr>
-              <a:t>LWR r3, [r2]</a:t>
+              <a:t>LDR r3, [r2]</a:t>
             </a:r>
           </a:p>
           <a:p>
@@ -11132,7 +11132,7 @@
                 <a:latin typeface="Consolas" panose="020B0609020204030204" pitchFamily="49" charset="0"/>
                 <a:cs typeface="Consolas" panose="020B0609020204030204" pitchFamily="49" charset="0"/>
               </a:rPr>
-              <a:t>LWR r0, =x</a:t>
+              <a:t>LDR r0, =x</a:t>
             </a:r>
           </a:p>
           <a:p>
@@ -11144,7 +11144,7 @@
                 <a:latin typeface="Consolas" panose="020B0609020204030204" pitchFamily="49" charset="0"/>
                 <a:cs typeface="Consolas" panose="020B0609020204030204" pitchFamily="49" charset="0"/>
               </a:rPr>
-              <a:t>LWR r1, [r0]</a:t>
+              <a:t>LDR r1, [r0]</a:t>
             </a:r>
           </a:p>
           <a:p>
@@ -11731,7 +11731,7 @@
                 <a:latin typeface="Consolas" panose="020B0609020204030204" pitchFamily="49" charset="0"/>
                 <a:cs typeface="Consolas" panose="020B0609020204030204" pitchFamily="49" charset="0"/>
               </a:rPr>
-              <a:t>LWR r0, =x</a:t>
+              <a:t>LDR r0, =x</a:t>
             </a:r>
           </a:p>
           <a:p>
@@ -11743,7 +11743,7 @@
                 <a:latin typeface="Consolas" panose="020B0609020204030204" pitchFamily="49" charset="0"/>
                 <a:cs typeface="Consolas" panose="020B0609020204030204" pitchFamily="49" charset="0"/>
               </a:rPr>
-              <a:t>LWR r1, [r0]</a:t>
+              <a:t>LDR r1, [r0]</a:t>
             </a:r>
           </a:p>
           <a:p>
@@ -11831,7 +11831,7 @@
                 <a:latin typeface="Consolas" panose="020B0609020204030204" pitchFamily="49" charset="0"/>
                 <a:cs typeface="Consolas" panose="020B0609020204030204" pitchFamily="49" charset="0"/>
               </a:rPr>
-              <a:t>LWR r2, =x</a:t>
+              <a:t>LDR r2, =x</a:t>
             </a:r>
           </a:p>
           <a:p>
@@ -11843,7 +11843,7 @@
                 <a:latin typeface="Consolas" panose="020B0609020204030204" pitchFamily="49" charset="0"/>
                 <a:cs typeface="Consolas" panose="020B0609020204030204" pitchFamily="49" charset="0"/>
               </a:rPr>
-              <a:t>LWR r3, [r2]</a:t>
+              <a:t>LDR r3, [r2]</a:t>
             </a:r>
           </a:p>
           <a:p>
@@ -12079,7 +12079,7 @@
             </a:pPr>
             <a:r>
               <a:rPr lang="en-US" sz="1800" dirty="0"/>
-              <a:t>Help you understand how does the processor work</a:t>
+              <a:t>Help you understand how the processor works</a:t>
             </a:r>
           </a:p>
           <a:p>
@@ -12112,7 +12112,7 @@
             </a:pPr>
             <a:r>
               <a:rPr lang="en-US" sz="1800" dirty="0"/>
-              <a:t>Use the profiling tools to find the performance bottle and rewrite that code section in assembly</a:t>
+              <a:t>Use the profiling tools to find the performance bottleneck and rewrite that code section in assembly</a:t>
             </a:r>
           </a:p>
           <a:p>
@@ -12134,18 +12134,18 @@
             </a:pPr>
             <a:r>
               <a:rPr lang="en-US" sz="1800" dirty="0"/>
-              <a:t>Standard C compilers do not use some operations available on ARM processors, such </a:t>
+              <a:t>Standard C compilers do not use some operations available on ARM processors, such as ROR</a:t>
             </a:r>
             <a:r>
               <a:rPr lang="en-US" sz="1800" dirty="0">
                 <a:latin typeface="Consolas" panose="020B0609020204030204" pitchFamily="49" charset="0"/>
                 <a:cs typeface="Consolas" panose="020B0609020204030204" pitchFamily="49" charset="0"/>
               </a:rPr>
-              <a:t>ROR</a:t>
+              <a:t/>
             </a:r>
             <a:r>
               <a:rPr lang="en-US" sz="1800" dirty="0"/>
-              <a:t> (Rotate Right) and </a:t>
+              <a:t xml:space="preserve"> (Rotate Right) and </a:t>
             </a:r>
             <a:r>
               <a:rPr lang="en-US" sz="1800" dirty="0">
@@ -12156,7 +12156,7 @@
             </a:r>
             <a:r>
               <a:rPr lang="en-US" sz="1800" dirty="0"/>
-              <a:t> (Rotate Right Extended). </a:t>
+              <a:t xml:space="preserve"> (Rotate Right Extended). </a:t>
             </a:r>
           </a:p>
           <a:p>
@@ -12233,7 +12233,7 @@
             </a:pPr>
             <a:r>
               <a:rPr lang="en-US" sz="1800" dirty="0"/>
-              <a:t>Embedded devices, where the size of code is limited, wash machine controller, automobile controllers</a:t>
+              <a:t>Embedded devices, where the size of code is limited, washing machine controllers, automobile controllers</a:t>
             </a:r>
           </a:p>
           <a:p>
@@ -12408,7 +12408,7 @@
           <a:p>
             <a:r>
               <a:rPr lang="en-US" sz="2800" dirty="0"/>
-              <a:t>Assembly should be used for performance critical sessions</a:t>
+              <a:t>Assembly should be used for performance critical sections</a:t>
             </a:r>
           </a:p>
           <a:p>
@@ -13892,7 +13892,7 @@
             </a:pPr>
             <a:r>
               <a:rPr lang="en-US" sz="2000" dirty="0"/>
-              <a:t>Embedded devices, where the size of code is limited, wash machine controller, automobile controllers</a:t>
+              <a:t>Embedded devices, where the size of code is limited, washing machine controllers, automobile controllers</a:t>
             </a:r>
           </a:p>
         </p:txBody>
@@ -14123,7 +14123,7 @@
                 <a:latin typeface="Consolas" panose="020B0609020204030204" pitchFamily="49" charset="0"/>
                 <a:cs typeface="Consolas" panose="020B0609020204030204" pitchFamily="49" charset="0"/>
               </a:rPr>
-              <a:t>MSR/MSR  </a:t>
+              <a:t xml:space="preserve">MSR/MRS  </a:t>
             </a:r>
             <a:r>
               <a:rPr lang="en-US" sz="1700" i="1" dirty="0">
@@ -14927,7 +14927,7 @@
                 <a:latin typeface="Consolas" panose="020B0609020204030204" pitchFamily="49" charset="0"/>
                 <a:cs typeface="Consolas" panose="020B0609020204030204" pitchFamily="49" charset="0"/>
               </a:rPr>
-              <a:t>MSR/MSR  </a:t>
+              <a:t xml:space="preserve">MSR/MRS  </a:t>
             </a:r>
             <a:r>
               <a:rPr lang="en-US" sz="1700" i="1" dirty="0">
@@ -15042,7 +15042,7 @@
             </a:pPr>
             <a:r>
               <a:rPr lang="en-US" sz="1800" dirty="0"/>
-              <a:t>written in assembly, and possible in C with inline assembly</a:t>
+              <a:t>written in assembly, and possibly in C with inline assembly</a:t>
             </a:r>
           </a:p>
           <a:p>
@@ -15963,7 +15963,7 @@
                   </a:schemeClr>
                 </a:solidFill>
               </a:rPr>
-              <a:t>written in assembly, and possible in C with inline assembly</a:t>
+              <a:t>written in assembly, and possibly in C with inline assembly</a:t>
             </a:r>
           </a:p>
           <a:p>
